--- a/classes/parte-2-criptografia-aplicada/062-criptografia-post-cuantica/clase-062-presentacion.pptx
+++ b/classes/parte-2-criptografia-aplicada/062-criptografia-post-cuantica/clase-062-presentacion.pptx
@@ -17,6 +17,9 @@
     <p:sldId id="265" r:id="rId16"/>
     <p:sldId id="266" r:id="rId17"/>
     <p:sldId id="267" r:id="rId18"/>
+    <p:sldId id="268" r:id="rId19"/>
+    <p:sldId id="269" r:id="rId20"/>
+    <p:sldId id="270" r:id="rId21"/>
   </p:sldIdLst>
   <p:sldSz cx="9144000" cy="6858000" type="screen4x3"/>
   <p:notesSz cx="6858000" cy="9144000"/>
@@ -3198,7 +3201,7 @@
                   <a:srgbClr val="0B3D2E"/>
                 </a:solidFill>
               </a:rPr>
-              <a:t>⚠️ Errores comunes</a:t>
+              <a:t>✍️ Ejercicios</a:t>
             </a:r>
           </a:p>
         </p:txBody>
@@ -3236,67 +3239,82 @@
                   <a:srgbClr val="22282E"/>
                 </a:solidFill>
               </a:rPr>
-              <a:t>•  "Aún no hay cuánticas, no me afecta" — Ignora harvest-now-decrypt-later; migra datos de larga vida</a:t>
-            </a:r>
-          </a:p>
-          <a:p>
-            <a:pPr>
-              <a:spcAft>
-                <a:spcPts val="600"/>
-              </a:spcAft>
-            </a:pPr>
-            <a:r>
-              <a:rPr sz="1500">
-                <a:solidFill>
-                  <a:srgbClr val="22282E"/>
-                </a:solidFill>
-              </a:rPr>
-              <a:t>•  Sustituir clásico por PQC sin híbrido — PQC es joven; usa esquemas híbridos durante la transición</a:t>
-            </a:r>
-          </a:p>
-          <a:p>
-            <a:pPr>
-              <a:spcAft>
-                <a:spcPts val="600"/>
-              </a:spcAft>
-            </a:pPr>
-            <a:r>
-              <a:rPr sz="1500">
-                <a:solidFill>
-                  <a:srgbClr val="22282E"/>
-                </a:solidFill>
-              </a:rPr>
-              <a:t>•  Ignorar el mayor tamaño de claves/firmas — Impacta ancho de banda y almacenamiento; planifícalo</a:t>
-            </a:r>
-          </a:p>
-          <a:p>
-            <a:pPr>
-              <a:spcAft>
-                <a:spcPts val="600"/>
-              </a:spcAft>
-            </a:pPr>
-            <a:r>
-              <a:rPr sz="1500">
-                <a:solidFill>
-                  <a:srgbClr val="22282E"/>
-                </a:solidFill>
-              </a:rPr>
-              <a:t>•  Reforzar RSA aumentando bits contra Shor — No sirve; migra a PQC</a:t>
-            </a:r>
-          </a:p>
-          <a:p>
-            <a:pPr>
-              <a:spcAft>
-                <a:spcPts val="600"/>
-              </a:spcAft>
-            </a:pPr>
-            <a:r>
-              <a:rPr sz="1500">
-                <a:solidFill>
-                  <a:srgbClr val="22282E"/>
-                </a:solidFill>
-              </a:rPr>
-              <a:t>•  Usar implementaciones PQC no auditadas en producción — Prefiere librerías estandarizadas y revisadas</a:t>
+              <a:t>•  Explica por qué Shor rompe ECC pero Grover no rompe AES.</a:t>
+            </a:r>
+          </a:p>
+          <a:p>
+            <a:pPr>
+              <a:spcAft>
+                <a:spcPts val="600"/>
+              </a:spcAft>
+            </a:pPr>
+            <a:r>
+              <a:rPr sz="1500">
+                <a:solidFill>
+                  <a:srgbClr val="22282E"/>
+                </a:solidFill>
+              </a:rPr>
+              <a:t>•  Ajusta parámetros simétricos para conservar 128 bits post-Grover.</a:t>
+            </a:r>
+          </a:p>
+          <a:p>
+            <a:pPr>
+              <a:spcAft>
+                <a:spcPts val="600"/>
+              </a:spcAft>
+            </a:pPr>
+            <a:r>
+              <a:rPr sz="1500">
+                <a:solidFill>
+                  <a:srgbClr val="22282E"/>
+                </a:solidFill>
+              </a:rPr>
+              <a:t>•  Compara tamaños de clave/firma de ML-DSA frente a Ed25519.</a:t>
+            </a:r>
+          </a:p>
+          <a:p>
+            <a:pPr>
+              <a:spcAft>
+                <a:spcPts val="600"/>
+              </a:spcAft>
+            </a:pPr>
+            <a:r>
+              <a:rPr sz="1500">
+                <a:solidFill>
+                  <a:srgbClr val="22282E"/>
+                </a:solidFill>
+              </a:rPr>
+              <a:t>•  Describe un handshake híbrido X25519 + ML-KEM.</a:t>
+            </a:r>
+          </a:p>
+          <a:p>
+            <a:pPr>
+              <a:spcAft>
+                <a:spcPts val="600"/>
+              </a:spcAft>
+            </a:pPr>
+            <a:r>
+              <a:rPr sz="1500">
+                <a:solidFill>
+                  <a:srgbClr val="22282E"/>
+                </a:solidFill>
+              </a:rPr>
+              <a:t>•  Investiga qué datos de tu organización son sensibles a "harvest now, decrypt later".</a:t>
+            </a:r>
+          </a:p>
+          <a:p>
+            <a:pPr>
+              <a:spcAft>
+                <a:spcPts val="600"/>
+              </a:spcAft>
+            </a:pPr>
+            <a:r>
+              <a:rPr sz="1500">
+                <a:solidFill>
+                  <a:srgbClr val="22282E"/>
+                </a:solidFill>
+              </a:rPr>
+              <a:t>•  Resume el estado de los estándares FIPS 203/204/205.</a:t>
             </a:r>
           </a:p>
         </p:txBody>
@@ -3347,7 +3365,7 @@
                   <a:srgbClr val="0B3D2E"/>
                 </a:solidFill>
               </a:rPr>
-              <a:t>❓ Preguntas frecuentes</a:t>
+              <a:t>📝 Reto verificable</a:t>
             </a:r>
           </a:p>
         </p:txBody>
@@ -3385,82 +3403,7 @@
                   <a:srgbClr val="22282E"/>
                 </a:solidFill>
               </a:rPr>
-              <a:t>•  ❓ ¿Cuándo llegará una computadora cuántica que rompa RSA?</a:t>
-            </a:r>
-          </a:p>
-          <a:p>
-            <a:pPr>
-              <a:spcAft>
-                <a:spcPts val="600"/>
-              </a:spcAft>
-            </a:pPr>
-            <a:r>
-              <a:rPr sz="1500">
-                <a:solidFill>
-                  <a:srgbClr val="22282E"/>
-                </a:solidFill>
-              </a:rPr>
-              <a:t>•  Es incierto; podrían faltar muchos años. Pero los datos con vida útil larga ya están en riesgo por harvest-now-decrypt-later.</a:t>
-            </a:r>
-          </a:p>
-          <a:p>
-            <a:pPr>
-              <a:spcAft>
-                <a:spcPts val="600"/>
-              </a:spcAft>
-            </a:pPr>
-            <a:r>
-              <a:rPr sz="1500">
-                <a:solidFill>
-                  <a:srgbClr val="22282E"/>
-                </a:solidFill>
-              </a:rPr>
-              <a:t>•  ❓ ¿Debo dejar de usar AES?</a:t>
-            </a:r>
-          </a:p>
-          <a:p>
-            <a:pPr>
-              <a:spcAft>
-                <a:spcPts val="600"/>
-              </a:spcAft>
-            </a:pPr>
-            <a:r>
-              <a:rPr sz="1500">
-                <a:solidFill>
-                  <a:srgbClr val="22282E"/>
-                </a:solidFill>
-              </a:rPr>
-              <a:t>•  No; con AES-256 conservas ~128 bits frente a Grover. La urgencia está en la cripto asimétrica.</a:t>
-            </a:r>
-          </a:p>
-          <a:p>
-            <a:pPr>
-              <a:spcAft>
-                <a:spcPts val="600"/>
-              </a:spcAft>
-            </a:pPr>
-            <a:r>
-              <a:rPr sz="1500">
-                <a:solidFill>
-                  <a:srgbClr val="22282E"/>
-                </a:solidFill>
-              </a:rPr>
-              <a:t>•  ❓ ¿Qué uso ya mismo?</a:t>
-            </a:r>
-          </a:p>
-          <a:p>
-            <a:pPr>
-              <a:spcAft>
-                <a:spcPts val="600"/>
-              </a:spcAft>
-            </a:pPr>
-            <a:r>
-              <a:rPr sz="1500">
-                <a:solidFill>
-                  <a:srgbClr val="22282E"/>
-                </a:solidFill>
-              </a:rPr>
-              <a:t>•  Empieza por handshakes híbridos (X25519 + ML-KEM) donde tu stack lo soporte y planifica la firma con ML-DSA/SLH-DSA.</a:t>
+              <a:t>•  Implementa (o simula con las librerías disponibles) un intercambio de claves híbrido que derive la clave de sesión de X25519 y de un KEM post-cuántico mediante HKDF, y cifre un mensaje con AES-GCM.…</a:t>
             </a:r>
           </a:p>
         </p:txBody>
@@ -3511,7 +3454,7 @@
                   <a:srgbClr val="0B3D2E"/>
                 </a:solidFill>
               </a:rPr>
-              <a:t>🔗 Referencias</a:t>
+              <a:t>⚠️ Errores comunes</a:t>
             </a:r>
           </a:p>
         </p:txBody>
@@ -3549,6 +3492,319 @@
                   <a:srgbClr val="22282E"/>
                 </a:solidFill>
               </a:rPr>
+              <a:t>•  "Aún no hay cuánticas, no me afecta" — Ignora harvest-now-decrypt-later; migra datos de larga vida</a:t>
+            </a:r>
+          </a:p>
+          <a:p>
+            <a:pPr>
+              <a:spcAft>
+                <a:spcPts val="600"/>
+              </a:spcAft>
+            </a:pPr>
+            <a:r>
+              <a:rPr sz="1500">
+                <a:solidFill>
+                  <a:srgbClr val="22282E"/>
+                </a:solidFill>
+              </a:rPr>
+              <a:t>•  Sustituir clásico por PQC sin híbrido — PQC es joven; usa esquemas híbridos durante la transición</a:t>
+            </a:r>
+          </a:p>
+          <a:p>
+            <a:pPr>
+              <a:spcAft>
+                <a:spcPts val="600"/>
+              </a:spcAft>
+            </a:pPr>
+            <a:r>
+              <a:rPr sz="1500">
+                <a:solidFill>
+                  <a:srgbClr val="22282E"/>
+                </a:solidFill>
+              </a:rPr>
+              <a:t>•  Ignorar el mayor tamaño de claves/firmas — Impacta ancho de banda y almacenamiento; planifícalo</a:t>
+            </a:r>
+          </a:p>
+          <a:p>
+            <a:pPr>
+              <a:spcAft>
+                <a:spcPts val="600"/>
+              </a:spcAft>
+            </a:pPr>
+            <a:r>
+              <a:rPr sz="1500">
+                <a:solidFill>
+                  <a:srgbClr val="22282E"/>
+                </a:solidFill>
+              </a:rPr>
+              <a:t>•  Reforzar RSA aumentando bits contra Shor — No sirve; migra a PQC</a:t>
+            </a:r>
+          </a:p>
+          <a:p>
+            <a:pPr>
+              <a:spcAft>
+                <a:spcPts val="600"/>
+              </a:spcAft>
+            </a:pPr>
+            <a:r>
+              <a:rPr sz="1500">
+                <a:solidFill>
+                  <a:srgbClr val="22282E"/>
+                </a:solidFill>
+              </a:rPr>
+              <a:t>•  Usar implementaciones PQC no auditadas en producción — Prefiere librerías estandarizadas y revisadas</a:t>
+            </a:r>
+          </a:p>
+        </p:txBody>
+      </p:sp>
+    </p:spTree>
+  </p:cSld>
+  <p:clrMapOvr>
+    <a:masterClrMapping/>
+  </p:clrMapOvr>
+</p:sld>
+</file>
+
+<file path=ppt/slides/slide13.xml><?xml version="1.0" encoding="utf-8"?>
+<p:sld xmlns:a="http://schemas.openxmlformats.org/drawingml/2006/main" xmlns:p="http://schemas.openxmlformats.org/presentationml/2006/main" xmlns:r="http://schemas.openxmlformats.org/officeDocument/2006/relationships">
+  <p:cSld>
+    <p:spTree>
+      <p:nvGrpSpPr>
+        <p:cNvPr id="1" name=""/>
+        <p:cNvGrpSpPr/>
+        <p:nvPr/>
+      </p:nvGrpSpPr>
+      <p:grpSpPr/>
+      <p:sp>
+        <p:nvSpPr>
+          <p:cNvPr id="2" name="TextBox 1"/>
+          <p:cNvSpPr txBox="1"/>
+          <p:nvPr/>
+        </p:nvSpPr>
+        <p:spPr>
+          <a:xfrm>
+            <a:off x="457200" y="320040"/>
+            <a:ext cx="8229600" cy="822960"/>
+          </a:xfrm>
+          <a:prstGeom prst="rect">
+            <a:avLst/>
+          </a:prstGeom>
+          <a:noFill/>
+        </p:spPr>
+        <p:txBody>
+          <a:bodyPr wrap="square">
+            <a:spAutoFit/>
+          </a:bodyPr>
+          <a:lstStyle/>
+          <a:p>
+            <a:r>
+              <a:rPr sz="2600" b="1">
+                <a:solidFill>
+                  <a:srgbClr val="0B3D2E"/>
+                </a:solidFill>
+              </a:rPr>
+              <a:t>❓ Preguntas frecuentes</a:t>
+            </a:r>
+          </a:p>
+        </p:txBody>
+      </p:sp>
+      <p:sp>
+        <p:nvSpPr>
+          <p:cNvPr id="3" name="TextBox 2"/>
+          <p:cNvSpPr txBox="1"/>
+          <p:nvPr/>
+        </p:nvSpPr>
+        <p:spPr>
+          <a:xfrm>
+            <a:off x="457200" y="1280160"/>
+            <a:ext cx="8229600" cy="4937760"/>
+          </a:xfrm>
+          <a:prstGeom prst="rect">
+            <a:avLst/>
+          </a:prstGeom>
+          <a:noFill/>
+        </p:spPr>
+        <p:txBody>
+          <a:bodyPr wrap="square">
+            <a:spAutoFit/>
+          </a:bodyPr>
+          <a:lstStyle/>
+          <a:p>
+            <a:pPr>
+              <a:spcAft>
+                <a:spcPts val="600"/>
+              </a:spcAft>
+            </a:pPr>
+            <a:r>
+              <a:rPr sz="1500">
+                <a:solidFill>
+                  <a:srgbClr val="22282E"/>
+                </a:solidFill>
+              </a:rPr>
+              <a:t>•  ❓ ¿Cuándo llegará una computadora cuántica que rompa RSA?</a:t>
+            </a:r>
+          </a:p>
+          <a:p>
+            <a:pPr>
+              <a:spcAft>
+                <a:spcPts val="600"/>
+              </a:spcAft>
+            </a:pPr>
+            <a:r>
+              <a:rPr sz="1500">
+                <a:solidFill>
+                  <a:srgbClr val="22282E"/>
+                </a:solidFill>
+              </a:rPr>
+              <a:t>•  Es incierto; podrían faltar muchos años. Pero los datos con vida útil larga ya están en riesgo por harvest-now-decrypt-later.</a:t>
+            </a:r>
+          </a:p>
+          <a:p>
+            <a:pPr>
+              <a:spcAft>
+                <a:spcPts val="600"/>
+              </a:spcAft>
+            </a:pPr>
+            <a:r>
+              <a:rPr sz="1500">
+                <a:solidFill>
+                  <a:srgbClr val="22282E"/>
+                </a:solidFill>
+              </a:rPr>
+              <a:t>•  ❓ ¿Debo dejar de usar AES?</a:t>
+            </a:r>
+          </a:p>
+          <a:p>
+            <a:pPr>
+              <a:spcAft>
+                <a:spcPts val="600"/>
+              </a:spcAft>
+            </a:pPr>
+            <a:r>
+              <a:rPr sz="1500">
+                <a:solidFill>
+                  <a:srgbClr val="22282E"/>
+                </a:solidFill>
+              </a:rPr>
+              <a:t>•  No; con AES-256 conservas ~128 bits frente a Grover. La urgencia está en la cripto asimétrica.</a:t>
+            </a:r>
+          </a:p>
+          <a:p>
+            <a:pPr>
+              <a:spcAft>
+                <a:spcPts val="600"/>
+              </a:spcAft>
+            </a:pPr>
+            <a:r>
+              <a:rPr sz="1500">
+                <a:solidFill>
+                  <a:srgbClr val="22282E"/>
+                </a:solidFill>
+              </a:rPr>
+              <a:t>•  ❓ ¿Qué uso ya mismo?</a:t>
+            </a:r>
+          </a:p>
+          <a:p>
+            <a:pPr>
+              <a:spcAft>
+                <a:spcPts val="600"/>
+              </a:spcAft>
+            </a:pPr>
+            <a:r>
+              <a:rPr sz="1500">
+                <a:solidFill>
+                  <a:srgbClr val="22282E"/>
+                </a:solidFill>
+              </a:rPr>
+              <a:t>•  Empieza por handshakes híbridos (X25519 + ML-KEM) donde tu stack lo soporte y planifica la firma con ML-DSA/SLH-DSA.</a:t>
+            </a:r>
+          </a:p>
+        </p:txBody>
+      </p:sp>
+    </p:spTree>
+  </p:cSld>
+  <p:clrMapOvr>
+    <a:masterClrMapping/>
+  </p:clrMapOvr>
+</p:sld>
+</file>
+
+<file path=ppt/slides/slide14.xml><?xml version="1.0" encoding="utf-8"?>
+<p:sld xmlns:a="http://schemas.openxmlformats.org/drawingml/2006/main" xmlns:p="http://schemas.openxmlformats.org/presentationml/2006/main" xmlns:r="http://schemas.openxmlformats.org/officeDocument/2006/relationships">
+  <p:cSld>
+    <p:spTree>
+      <p:nvGrpSpPr>
+        <p:cNvPr id="1" name=""/>
+        <p:cNvGrpSpPr/>
+        <p:nvPr/>
+      </p:nvGrpSpPr>
+      <p:grpSpPr/>
+      <p:sp>
+        <p:nvSpPr>
+          <p:cNvPr id="2" name="TextBox 1"/>
+          <p:cNvSpPr txBox="1"/>
+          <p:nvPr/>
+        </p:nvSpPr>
+        <p:spPr>
+          <a:xfrm>
+            <a:off x="457200" y="320040"/>
+            <a:ext cx="8229600" cy="822960"/>
+          </a:xfrm>
+          <a:prstGeom prst="rect">
+            <a:avLst/>
+          </a:prstGeom>
+          <a:noFill/>
+        </p:spPr>
+        <p:txBody>
+          <a:bodyPr wrap="square">
+            <a:spAutoFit/>
+          </a:bodyPr>
+          <a:lstStyle/>
+          <a:p>
+            <a:r>
+              <a:rPr sz="2600" b="1">
+                <a:solidFill>
+                  <a:srgbClr val="0B3D2E"/>
+                </a:solidFill>
+              </a:rPr>
+              <a:t>🔗 Referencias</a:t>
+            </a:r>
+          </a:p>
+        </p:txBody>
+      </p:sp>
+      <p:sp>
+        <p:nvSpPr>
+          <p:cNvPr id="3" name="TextBox 2"/>
+          <p:cNvSpPr txBox="1"/>
+          <p:nvPr/>
+        </p:nvSpPr>
+        <p:spPr>
+          <a:xfrm>
+            <a:off x="457200" y="1280160"/>
+            <a:ext cx="8229600" cy="4937760"/>
+          </a:xfrm>
+          <a:prstGeom prst="rect">
+            <a:avLst/>
+          </a:prstGeom>
+          <a:noFill/>
+        </p:spPr>
+        <p:txBody>
+          <a:bodyPr wrap="square">
+            <a:spAutoFit/>
+          </a:bodyPr>
+          <a:lstStyle/>
+          <a:p>
+            <a:pPr>
+              <a:spcAft>
+                <a:spcPts val="600"/>
+              </a:spcAft>
+            </a:pPr>
+            <a:r>
+              <a:rPr sz="1500">
+                <a:solidFill>
+                  <a:srgbClr val="22282E"/>
+                </a:solidFill>
+              </a:rPr>
               <a:t>•  NIST PQC: FIPS 203 (ML-KEM), 204 (ML-DSA), 205 (SLH-DSA) — &lt;https://csrc.nist.gov/projects/post-quantum-cryptography&gt;</a:t>
             </a:r>
           </a:p>
@@ -3599,6 +3855,81 @@
           </a:p>
         </p:txBody>
       </p:sp>
+    </p:spTree>
+  </p:cSld>
+  <p:clrMapOvr>
+    <a:masterClrMapping/>
+  </p:clrMapOvr>
+</p:sld>
+</file>
+
+<file path=ppt/slides/slide15.xml><?xml version="1.0" encoding="utf-8"?>
+<p:sld xmlns:a="http://schemas.openxmlformats.org/drawingml/2006/main" xmlns:p="http://schemas.openxmlformats.org/presentationml/2006/main" xmlns:r="http://schemas.openxmlformats.org/officeDocument/2006/relationships">
+  <p:cSld>
+    <p:spTree>
+      <p:nvGrpSpPr>
+        <p:cNvPr id="1" name=""/>
+        <p:cNvGrpSpPr/>
+        <p:nvPr/>
+      </p:nvGrpSpPr>
+      <p:grpSpPr/>
+      <p:sp>
+        <p:nvSpPr>
+          <p:cNvPr id="2" name="TextBox 1"/>
+          <p:cNvSpPr txBox="1"/>
+          <p:nvPr/>
+        </p:nvSpPr>
+        <p:spPr>
+          <a:xfrm>
+            <a:off x="457200" y="274320"/>
+            <a:ext cx="8229600" cy="640080"/>
+          </a:xfrm>
+          <a:prstGeom prst="rect">
+            <a:avLst/>
+          </a:prstGeom>
+          <a:noFill/>
+        </p:spPr>
+        <p:txBody>
+          <a:bodyPr wrap="square">
+            <a:spAutoFit/>
+          </a:bodyPr>
+          <a:lstStyle/>
+          <a:p>
+            <a:r>
+              <a:rPr sz="2200" b="1">
+                <a:solidFill>
+                  <a:srgbClr val="0B3D2E"/>
+                </a:solidFill>
+              </a:rPr>
+              <a:t>Diagrama de la clase</a:t>
+            </a:r>
+          </a:p>
+        </p:txBody>
+      </p:sp>
+      <p:pic>
+        <p:nvPicPr>
+          <p:cNvPr id="3" name="Picture 2" descr="fd826502510abb4d.png"/>
+          <p:cNvPicPr>
+            <a:picLocks noChangeAspect="1"/>
+          </p:cNvPicPr>
+          <p:nvPr/>
+        </p:nvPicPr>
+        <p:blipFill>
+          <a:blip r:embed="rId2"/>
+          <a:stretch>
+            <a:fillRect/>
+          </a:stretch>
+        </p:blipFill>
+        <p:spPr>
+          <a:xfrm>
+            <a:off x="1398764" y="1097280"/>
+            <a:ext cx="6346471" cy="5303520"/>
+          </a:xfrm>
+          <a:prstGeom prst="rect">
+            <a:avLst/>
+          </a:prstGeom>
+        </p:spPr>
+      </p:pic>
     </p:spTree>
   </p:cSld>
   <p:clrMapOvr>
@@ -3683,7 +4014,7 @@
                   <a:srgbClr val="22282E"/>
                 </a:solidFill>
               </a:rPr>
-              <a:t>•  Comprender la amenaza que la computación cuántica plantea a la criptografía actual y qué se está haciendo al respecto. El alumno entenderá por qué el algoritmo de Shor rompería RSA, DH y ECC, por qué Grover solo debilita (no rompe) la cripto simétrica, cuáles son las familias post-cuánticas (basadas en retículos, hash, códigos), y los estándares ya publicados por NIST (ML-KEM/Kyber, ML-DSA/Dilithium, SLH-DSA/SPHINCS+). También conocerá el concepto "harvest now, decrypt later".</a:t>
+              <a:t>•  Comprender la amenaza que la computación cuántica plantea a la criptografía actual y qué se está haciendo al respecto. El alumno entenderá por qué el algoritmo de Shor rompería RSA, DH y ECC, por qué…</a:t>
             </a:r>
           </a:p>
         </p:txBody>
@@ -4077,7 +4408,7 @@
                   <a:srgbClr val="0B3D2E"/>
                 </a:solidFill>
               </a:rPr>
-              <a:t>📖 Definiciones y características</a:t>
+              <a:t>🧠 Explicación en profundidad</a:t>
             </a:r>
           </a:p>
         </p:txBody>
@@ -4115,97 +4446,97 @@
                   <a:srgbClr val="22282E"/>
                 </a:solidFill>
               </a:rPr>
-              <a:t>•  Algoritmo de Shor: factoriza y resuelve logaritmos discretos en tiempo polinómico en una computadora cuántica; rompe RSA, DH y ECC.</a:t>
-            </a:r>
-          </a:p>
-          <a:p>
-            <a:pPr>
-              <a:spcAft>
-                <a:spcPts val="600"/>
-              </a:spcAft>
-            </a:pPr>
-            <a:r>
-              <a:rPr sz="1500">
-                <a:solidFill>
-                  <a:srgbClr val="22282E"/>
-                </a:solidFill>
-              </a:rPr>
-              <a:t>•  Algoritmo de Grover: acelera la búsqueda cuadráticamente; reduce la seguridad simétrica a la mitad (AES-256 → ~128 bits). Se mitiga con claves más largas.</a:t>
-            </a:r>
-          </a:p>
-          <a:p>
-            <a:pPr>
-              <a:spcAft>
-                <a:spcPts val="600"/>
-              </a:spcAft>
-            </a:pPr>
-            <a:r>
-              <a:rPr sz="1500">
-                <a:solidFill>
-                  <a:srgbClr val="22282E"/>
-                </a:solidFill>
-              </a:rPr>
-              <a:t>•  Criptografía basada en retículos: familia PQC (LWE) que sustenta ML-KEM (Kyber) y ML-DSA (Dilithium). Eficiente y bien estudiada.</a:t>
-            </a:r>
-          </a:p>
-          <a:p>
-            <a:pPr>
-              <a:spcAft>
-                <a:spcPts val="600"/>
-              </a:spcAft>
-            </a:pPr>
-            <a:r>
-              <a:rPr sz="1500">
-                <a:solidFill>
-                  <a:srgbClr val="22282E"/>
-                </a:solidFill>
-              </a:rPr>
-              <a:t>•  ML-KEM (Kyber): mecanismo de encapsulado de claves post-cuántico estandarizado (FIPS 203).</a:t>
-            </a:r>
-          </a:p>
-          <a:p>
-            <a:pPr>
-              <a:spcAft>
-                <a:spcPts val="600"/>
-              </a:spcAft>
-            </a:pPr>
-            <a:r>
-              <a:rPr sz="1500">
-                <a:solidFill>
-                  <a:srgbClr val="22282E"/>
-                </a:solidFill>
-              </a:rPr>
-              <a:t>•  ML-DSA (Dilithium) / SLH-DSA (SPHINCS+): firmas post-cuánticas (FIPS 204/205); SPHINCS+ se basa solo en hashes.</a:t>
-            </a:r>
-          </a:p>
-          <a:p>
-            <a:pPr>
-              <a:spcAft>
-                <a:spcPts val="600"/>
-              </a:spcAft>
-            </a:pPr>
-            <a:r>
-              <a:rPr sz="1500">
-                <a:solidFill>
-                  <a:srgbClr val="22282E"/>
-                </a:solidFill>
-              </a:rPr>
-              <a:t>•  Migración híbrida: combinar un esquema clásico (X25519) con uno PQC (ML-KEM) para no perder seguridad si uno falla.</a:t>
-            </a:r>
-          </a:p>
-          <a:p>
-            <a:pPr>
-              <a:spcAft>
-                <a:spcPts val="600"/>
-              </a:spcAft>
-            </a:pPr>
-            <a:r>
-              <a:rPr sz="1500">
-                <a:solidFill>
-                  <a:srgbClr val="22282E"/>
-                </a:solidFill>
-              </a:rPr>
-              <a:t>•  Harvest now, decrypt later: capturar tráfico cifrado hoy para descifrarlo cuando existan cuánticas; amenaza los datos de larga vida.</a:t>
+              <a:t>•  Un computador cuántico no es "un ordenador más rápido": explota superposición e</a:t>
+            </a:r>
+          </a:p>
+          <a:p>
+            <a:pPr>
+              <a:spcAft>
+                <a:spcPts val="600"/>
+              </a:spcAft>
+            </a:pPr>
+            <a:r>
+              <a:rPr sz="1500">
+                <a:solidFill>
+                  <a:srgbClr val="22282E"/>
+                </a:solidFill>
+              </a:rPr>
+              <a:t>•  interferencia para resolver ciertos problemas con una estructura algorítmica distinta. De</a:t>
+            </a:r>
+          </a:p>
+          <a:p>
+            <a:pPr>
+              <a:spcAft>
+                <a:spcPts val="600"/>
+              </a:spcAft>
+            </a:pPr>
+            <a:r>
+              <a:rPr sz="1500">
+                <a:solidFill>
+                  <a:srgbClr val="22282E"/>
+                </a:solidFill>
+              </a:rPr>
+              <a:t>•  todos los algoritmos conocidos, solo dos importan aquí, y confundir su alcance es el error</a:t>
+            </a:r>
+          </a:p>
+          <a:p>
+            <a:pPr>
+              <a:spcAft>
+                <a:spcPts val="600"/>
+              </a:spcAft>
+            </a:pPr>
+            <a:r>
+              <a:rPr sz="1500">
+                <a:solidFill>
+                  <a:srgbClr val="22282E"/>
+                </a:solidFill>
+              </a:rPr>
+              <a:t>•  más común del tema.</a:t>
+            </a:r>
+          </a:p>
+          <a:p>
+            <a:pPr>
+              <a:spcAft>
+                <a:spcPts val="600"/>
+              </a:spcAft>
+            </a:pPr>
+            <a:r>
+              <a:rPr sz="1500">
+                <a:solidFill>
+                  <a:srgbClr val="22282E"/>
+                </a:solidFill>
+              </a:rPr>
+              <a:t>•  El algoritmo de Shor (1994) factoriza enteros y calcula logaritmos discretos en tiempo</a:t>
+            </a:r>
+          </a:p>
+          <a:p>
+            <a:pPr>
+              <a:spcAft>
+                <a:spcPts val="600"/>
+              </a:spcAft>
+            </a:pPr>
+            <a:r>
+              <a:rPr sz="1500">
+                <a:solidFill>
+                  <a:srgbClr val="22282E"/>
+                </a:solidFill>
+              </a:rPr>
+              <a:t>•  polinómico. Eso significa que RSA, Diffie-Hellman y toda la criptografía de curva</a:t>
+            </a:r>
+          </a:p>
+          <a:p>
+            <a:pPr>
+              <a:spcAft>
+                <a:spcPts val="600"/>
+              </a:spcAft>
+            </a:pPr>
+            <a:r>
+              <a:rPr sz="1500">
+                <a:solidFill>
+                  <a:srgbClr val="22282E"/>
+                </a:solidFill>
+              </a:rPr>
+              <a:t>•  elíptica quedan completamente rotos ante un computador cuántico con suficientes qubits</a:t>
             </a:r>
           </a:p>
         </p:txBody>
@@ -4256,7 +4587,7 @@
                   <a:srgbClr val="0B3D2E"/>
                 </a:solidFill>
               </a:rPr>
-              <a:t>🧰 Herramientas y preparación</a:t>
+              <a:t>📖 Definiciones y características</a:t>
             </a:r>
           </a:p>
         </p:txBody>
@@ -4294,37 +4625,97 @@
                   <a:srgbClr val="22282E"/>
                 </a:solidFill>
               </a:rPr>
-              <a:t>•  openssl list -kem-algorithms 2&gt;/dev/null | grep -i mlkem || echo "usa liboqs/oqsprovider"</a:t>
-            </a:r>
-          </a:p>
-          <a:p>
-            <a:pPr>
-              <a:spcAft>
-                <a:spcPts val="600"/>
-              </a:spcAft>
-            </a:pPr>
-            <a:r>
-              <a:rPr sz="1500">
-                <a:solidFill>
-                  <a:srgbClr val="22282E"/>
-                </a:solidFill>
-              </a:rPr>
-              <a:t>•  pip install liboqs-python 2&gt;/dev/null || echo "opcional: bindings de liboqs"</a:t>
-            </a:r>
-          </a:p>
-          <a:p>
-            <a:pPr>
-              <a:spcAft>
-                <a:spcPts val="600"/>
-              </a:spcAft>
-            </a:pPr>
-            <a:r>
-              <a:rPr sz="1500">
-                <a:solidFill>
-                  <a:srgbClr val="22282E"/>
-                </a:solidFill>
-              </a:rPr>
-              <a:t>•  Laboratorio local. Uso experimental de primitivas PQC.</a:t>
+              <a:t>•  Algoritmo de Shor: factoriza y resuelve logaritmos discretos en tiempo polinómico en una computadora cuántica; rompe RSA, DH y ECC.</a:t>
+            </a:r>
+          </a:p>
+          <a:p>
+            <a:pPr>
+              <a:spcAft>
+                <a:spcPts val="600"/>
+              </a:spcAft>
+            </a:pPr>
+            <a:r>
+              <a:rPr sz="1500">
+                <a:solidFill>
+                  <a:srgbClr val="22282E"/>
+                </a:solidFill>
+              </a:rPr>
+              <a:t>•  Algoritmo de Grover: acelera la búsqueda cuadráticamente; reduce la seguridad simétrica a la mitad (AES-256 → ~128 bits). Se mitiga con claves más largas.</a:t>
+            </a:r>
+          </a:p>
+          <a:p>
+            <a:pPr>
+              <a:spcAft>
+                <a:spcPts val="600"/>
+              </a:spcAft>
+            </a:pPr>
+            <a:r>
+              <a:rPr sz="1500">
+                <a:solidFill>
+                  <a:srgbClr val="22282E"/>
+                </a:solidFill>
+              </a:rPr>
+              <a:t>•  Criptografía basada en retículos: familia PQC (LWE) que sustenta ML-KEM (Kyber) y ML-DSA (Dilithium). Eficiente y bien estudiada.</a:t>
+            </a:r>
+          </a:p>
+          <a:p>
+            <a:pPr>
+              <a:spcAft>
+                <a:spcPts val="600"/>
+              </a:spcAft>
+            </a:pPr>
+            <a:r>
+              <a:rPr sz="1500">
+                <a:solidFill>
+                  <a:srgbClr val="22282E"/>
+                </a:solidFill>
+              </a:rPr>
+              <a:t>•  ML-KEM (Kyber): mecanismo de encapsulado de claves post-cuántico estandarizado (FIPS 203).</a:t>
+            </a:r>
+          </a:p>
+          <a:p>
+            <a:pPr>
+              <a:spcAft>
+                <a:spcPts val="600"/>
+              </a:spcAft>
+            </a:pPr>
+            <a:r>
+              <a:rPr sz="1500">
+                <a:solidFill>
+                  <a:srgbClr val="22282E"/>
+                </a:solidFill>
+              </a:rPr>
+              <a:t>•  ML-DSA (Dilithium) / SLH-DSA (SPHINCS+): firmas post-cuánticas (FIPS 204/205); SPHINCS+ se basa solo en hashes.</a:t>
+            </a:r>
+          </a:p>
+          <a:p>
+            <a:pPr>
+              <a:spcAft>
+                <a:spcPts val="600"/>
+              </a:spcAft>
+            </a:pPr>
+            <a:r>
+              <a:rPr sz="1500">
+                <a:solidFill>
+                  <a:srgbClr val="22282E"/>
+                </a:solidFill>
+              </a:rPr>
+              <a:t>•  Migración híbrida: combinar un esquema clásico (X25519) con uno PQC (ML-KEM) para no perder seguridad si uno falla.</a:t>
+            </a:r>
+          </a:p>
+          <a:p>
+            <a:pPr>
+              <a:spcAft>
+                <a:spcPts val="600"/>
+              </a:spcAft>
+            </a:pPr>
+            <a:r>
+              <a:rPr sz="1500">
+                <a:solidFill>
+                  <a:srgbClr val="22282E"/>
+                </a:solidFill>
+              </a:rPr>
+              <a:t>•  Harvest now, decrypt later: capturar tráfico cifrado hoy para descifrarlo cuando existan cuánticas; amenaza los datos de larga vida.</a:t>
             </a:r>
           </a:p>
         </p:txBody>
@@ -4375,7 +4766,7 @@
                   <a:srgbClr val="0B3D2E"/>
                 </a:solidFill>
               </a:rPr>
-              <a:t>🧪 Laboratorio guiado</a:t>
+              <a:t>📔 Glosario</a:t>
             </a:r>
           </a:p>
         </p:txBody>
@@ -4413,67 +4804,97 @@
                   <a:srgbClr val="22282E"/>
                 </a:solidFill>
               </a:rPr>
-              <a:t>•  Explora los algoritmos PQC disponibles. Con OpenSSL 3.5+ (o el proveedor OQS), lista los KEM y firmas post-cuánticas soportadas.</a:t>
-            </a:r>
-          </a:p>
-          <a:p>
-            <a:pPr>
-              <a:spcAft>
-                <a:spcPts val="600"/>
-              </a:spcAft>
-            </a:pPr>
-            <a:r>
-              <a:rPr sz="1500">
-                <a:solidFill>
-                  <a:srgbClr val="22282E"/>
-                </a:solidFill>
-              </a:rPr>
-              <a:t>•  Encapsulado de clave con ML-KEM (si está disponible): genera un par, encapsula un secreto compartido y decapsúlalo; verifica que ambas partes obtienen el mismo secreto, análogo a un ECDH pero resistente a cuántica.</a:t>
-            </a:r>
-          </a:p>
-          <a:p>
-            <a:pPr>
-              <a:spcAft>
-                <a:spcPts val="600"/>
-              </a:spcAft>
-            </a:pPr>
-            <a:r>
-              <a:rPr sz="1500">
-                <a:solidFill>
-                  <a:srgbClr val="22282E"/>
-                </a:solidFill>
-              </a:rPr>
-              <a:t>•  Firma con ML-DSA: firma un documento y verifícalo; compara el tamaño de la firma y de las claves con Ed25519 (las PQC son notablemente mayores).</a:t>
-            </a:r>
-          </a:p>
-          <a:p>
-            <a:pPr>
-              <a:spcAft>
-                <a:spcPts val="600"/>
-              </a:spcAft>
-            </a:pPr>
-            <a:r>
-              <a:rPr sz="1500">
-                <a:solidFill>
-                  <a:srgbClr val="22282E"/>
-                </a:solidFill>
-              </a:rPr>
-              <a:t>•  Handshake híbrido (concepto y demo). Deriva la clave de sesión combinando el secreto de X25519 con el de ML-KEM mediante HKDF; explica por qué el canal es seguro salvo que ambos se rompan.</a:t>
-            </a:r>
-          </a:p>
-          <a:p>
-            <a:pPr>
-              <a:spcAft>
-                <a:spcPts val="600"/>
-              </a:spcAft>
-            </a:pPr>
-            <a:r>
-              <a:rPr sz="1500">
-                <a:solidFill>
-                  <a:srgbClr val="22282E"/>
-                </a:solidFill>
-              </a:rPr>
-              <a:t>•  Analiza el impacto operativo: tamaños de clave/firma mayores, coste en ancho de banda y CPU, y compatibilidad. Discute qué datos priorizar por su vida útil.</a:t>
+              <a:t>•  Término — Definición concisa</a:t>
+            </a:r>
+          </a:p>
+          <a:p>
+            <a:pPr>
+              <a:spcAft>
+                <a:spcPts val="600"/>
+              </a:spcAft>
+            </a:pPr>
+            <a:r>
+              <a:rPr sz="1500">
+                <a:solidFill>
+                  <a:srgbClr val="22282E"/>
+                </a:solidFill>
+              </a:rPr>
+              <a:t>•  Qubit — Unidad cuántica que puede estar en superposición de estados</a:t>
+            </a:r>
+          </a:p>
+          <a:p>
+            <a:pPr>
+              <a:spcAft>
+                <a:spcPts val="600"/>
+              </a:spcAft>
+            </a:pPr>
+            <a:r>
+              <a:rPr sz="1500">
+                <a:solidFill>
+                  <a:srgbClr val="22282E"/>
+                </a:solidFill>
+              </a:rPr>
+              <a:t>•  Qubit lógico — Qubit corregido de errores; hacen falta muchos físicos por cada uno</a:t>
+            </a:r>
+          </a:p>
+          <a:p>
+            <a:pPr>
+              <a:spcAft>
+                <a:spcPts val="600"/>
+              </a:spcAft>
+            </a:pPr>
+            <a:r>
+              <a:rPr sz="1500">
+                <a:solidFill>
+                  <a:srgbClr val="22282E"/>
+                </a:solidFill>
+              </a:rPr>
+              <a:t>•  Algoritmo de Shor — Factoriza y resuelve logaritmos discretos; rompe RSA, DH y ECC</a:t>
+            </a:r>
+          </a:p>
+          <a:p>
+            <a:pPr>
+              <a:spcAft>
+                <a:spcPts val="600"/>
+              </a:spcAft>
+            </a:pPr>
+            <a:r>
+              <a:rPr sz="1500">
+                <a:solidFill>
+                  <a:srgbClr val="22282E"/>
+                </a:solidFill>
+              </a:rPr>
+              <a:t>•  Algoritmo de Grover — Acelera búsqueda; reduce la simétrica a la mitad de bits</a:t>
+            </a:r>
+          </a:p>
+          <a:p>
+            <a:pPr>
+              <a:spcAft>
+                <a:spcPts val="600"/>
+              </a:spcAft>
+            </a:pPr>
+            <a:r>
+              <a:rPr sz="1500">
+                <a:solidFill>
+                  <a:srgbClr val="22282E"/>
+                </a:solidFill>
+              </a:rPr>
+              <a:t>•  PQC — Criptografía post-cuántica: resistente a ambos algoritmos</a:t>
+            </a:r>
+          </a:p>
+          <a:p>
+            <a:pPr>
+              <a:spcAft>
+                <a:spcPts val="600"/>
+              </a:spcAft>
+            </a:pPr>
+            <a:r>
+              <a:rPr sz="1500">
+                <a:solidFill>
+                  <a:srgbClr val="22282E"/>
+                </a:solidFill>
+              </a:rPr>
+              <a:t>•  Harvest now, decrypt later — Capturar hoy para descifrar cuando exista la máquina</a:t>
             </a:r>
           </a:p>
         </p:txBody>
@@ -4524,7 +4945,7 @@
                   <a:srgbClr val="0B3D2E"/>
                 </a:solidFill>
               </a:rPr>
-              <a:t>✍️ Ejercicios</a:t>
+              <a:t>🧰 Herramientas y preparación</a:t>
             </a:r>
           </a:p>
         </p:txBody>
@@ -4562,82 +4983,7 @@
                   <a:srgbClr val="22282E"/>
                 </a:solidFill>
               </a:rPr>
-              <a:t>•  Explica por qué Shor rompe ECC pero Grover no rompe AES.</a:t>
-            </a:r>
-          </a:p>
-          <a:p>
-            <a:pPr>
-              <a:spcAft>
-                <a:spcPts val="600"/>
-              </a:spcAft>
-            </a:pPr>
-            <a:r>
-              <a:rPr sz="1500">
-                <a:solidFill>
-                  <a:srgbClr val="22282E"/>
-                </a:solidFill>
-              </a:rPr>
-              <a:t>•  Ajusta parámetros simétricos para conservar 128 bits post-Grover.</a:t>
-            </a:r>
-          </a:p>
-          <a:p>
-            <a:pPr>
-              <a:spcAft>
-                <a:spcPts val="600"/>
-              </a:spcAft>
-            </a:pPr>
-            <a:r>
-              <a:rPr sz="1500">
-                <a:solidFill>
-                  <a:srgbClr val="22282E"/>
-                </a:solidFill>
-              </a:rPr>
-              <a:t>•  Compara tamaños de clave/firma de ML-DSA frente a Ed25519.</a:t>
-            </a:r>
-          </a:p>
-          <a:p>
-            <a:pPr>
-              <a:spcAft>
-                <a:spcPts val="600"/>
-              </a:spcAft>
-            </a:pPr>
-            <a:r>
-              <a:rPr sz="1500">
-                <a:solidFill>
-                  <a:srgbClr val="22282E"/>
-                </a:solidFill>
-              </a:rPr>
-              <a:t>•  Describe un handshake híbrido X25519 + ML-KEM.</a:t>
-            </a:r>
-          </a:p>
-          <a:p>
-            <a:pPr>
-              <a:spcAft>
-                <a:spcPts val="600"/>
-              </a:spcAft>
-            </a:pPr>
-            <a:r>
-              <a:rPr sz="1500">
-                <a:solidFill>
-                  <a:srgbClr val="22282E"/>
-                </a:solidFill>
-              </a:rPr>
-              <a:t>•  Investiga qué datos de tu organización son sensibles a "harvest now, decrypt later".</a:t>
-            </a:r>
-          </a:p>
-          <a:p>
-            <a:pPr>
-              <a:spcAft>
-                <a:spcPts val="600"/>
-              </a:spcAft>
-            </a:pPr>
-            <a:r>
-              <a:rPr sz="1500">
-                <a:solidFill>
-                  <a:srgbClr val="22282E"/>
-                </a:solidFill>
-              </a:rPr>
-              <a:t>•  Resume el estado de los estándares FIPS 203/204/205.</a:t>
+              <a:t>•  Laboratorio local. Uso experimental de primitivas PQC.</a:t>
             </a:r>
           </a:p>
         </p:txBody>
@@ -4688,7 +5034,7 @@
                   <a:srgbClr val="0B3D2E"/>
                 </a:solidFill>
               </a:rPr>
-              <a:t>📝 Reto verificable</a:t>
+              <a:t>🧪 Laboratorio guiado</a:t>
             </a:r>
           </a:p>
         </p:txBody>
@@ -4726,7 +5072,67 @@
                   <a:srgbClr val="22282E"/>
                 </a:solidFill>
               </a:rPr>
-              <a:t>•  Implementa (o simula con las librerías disponibles) un intercambio de claves híbrido que derive la clave de sesión de X25519 y de un KEM post-cuántico mediante HKDF, y cifre un mensaje con AES-GCM. Criterio de aceptación: ambas partes descifran el mensaje, y documentas por qué el esquema sigue siendo seguro aunque una de las dos familias (clásica o PQC) resultara comprometida.</a:t>
+              <a:t>•  Explora los algoritmos PQC disponibles. Con OpenSSL 3.5+ (o el proveedor OQS), lista los KEM y firmas post-cuánticas soportadas.</a:t>
+            </a:r>
+          </a:p>
+          <a:p>
+            <a:pPr>
+              <a:spcAft>
+                <a:spcPts val="600"/>
+              </a:spcAft>
+            </a:pPr>
+            <a:r>
+              <a:rPr sz="1500">
+                <a:solidFill>
+                  <a:srgbClr val="22282E"/>
+                </a:solidFill>
+              </a:rPr>
+              <a:t>•  Encapsulado de clave con ML-KEM (si está disponible): genera un par, encapsula un secreto compartido y decapsúlalo; verifica que ambas partes obtienen el mismo secreto, análogo a un ECDH pero…</a:t>
+            </a:r>
+          </a:p>
+          <a:p>
+            <a:pPr>
+              <a:spcAft>
+                <a:spcPts val="600"/>
+              </a:spcAft>
+            </a:pPr>
+            <a:r>
+              <a:rPr sz="1500">
+                <a:solidFill>
+                  <a:srgbClr val="22282E"/>
+                </a:solidFill>
+              </a:rPr>
+              <a:t>•  Firma con ML-DSA: firma un documento y verifícalo; compara el tamaño de la firma y de las claves con Ed25519 (las PQC son notablemente mayores).</a:t>
+            </a:r>
+          </a:p>
+          <a:p>
+            <a:pPr>
+              <a:spcAft>
+                <a:spcPts val="600"/>
+              </a:spcAft>
+            </a:pPr>
+            <a:r>
+              <a:rPr sz="1500">
+                <a:solidFill>
+                  <a:srgbClr val="22282E"/>
+                </a:solidFill>
+              </a:rPr>
+              <a:t>•  Handshake híbrido (concepto y demo). Deriva la clave de sesión combinando el secreto de X25519 con el de ML-KEM mediante HKDF; explica por qué el canal es seguro salvo que ambos se rompan.</a:t>
+            </a:r>
+          </a:p>
+          <a:p>
+            <a:pPr>
+              <a:spcAft>
+                <a:spcPts val="600"/>
+              </a:spcAft>
+            </a:pPr>
+            <a:r>
+              <a:rPr sz="1500">
+                <a:solidFill>
+                  <a:srgbClr val="22282E"/>
+                </a:solidFill>
+              </a:rPr>
+              <a:t>•  Analiza el impacto operativo: tamaños de clave/firma mayores, coste en ancho de banda y CPU, y compatibilidad. Discute qué datos priorizar por su vida útil.</a:t>
             </a:r>
           </a:p>
         </p:txBody>
